--- a/samples/pptx-good.pptx
+++ b/samples/pptx-good.pptx
@@ -7,6 +7,7 @@
   <p:sldIdLst>
     <p:sldId id="256" r:id="rId7"/>
     <p:sldId id="257" r:id="rId9"/>
+    <p:sldId id="258" r:id="rId10"/>
   </p:sldIdLst>
   <p:sldSz cx="9144000" cy="6858000" type="screen4x3"/>
   <p:notesSz cx="6858000" cy="9144000"/>
@@ -607,7 +608,7 @@
           <a:lstStyle/>
           <a:p>
             <a:r>
-              <a:t>Chi tiết: khảo sát 50 khách hàng nhóm A trong tháng 7.</a:t>
+              <a:t>Chi tiết: khảo sát 50 khách hàng nhóm A trong tháng 7. [PPTX-07]</a:t>
             </a:r>
           </a:p>
         </p:txBody>
@@ -3629,7 +3630,7 @@
           <a:lstStyle/>
           <a:p>
             <a:r>
-              <a:t>Kế hoạch quý 3</a:t>
+              <a:t>Kế hoạch quý 3 [PPTX-01]</a:t>
             </a:r>
           </a:p>
         </p:txBody>
@@ -3650,19 +3651,19 @@
           <a:lstStyle/>
           <a:p>
             <a:r>
-              <a:t>Bước 1: khảo sát khách hàng</a:t>
-            </a:r>
-          </a:p>
-          <a:p>
-            <a:r>
-              <a:t>Bước 2: chốt tính năng</a:t>
+              <a:t>Bước 1: khảo sát khách hàng [PPTX-03: bullet thay SmartArt]</a:t>
+            </a:r>
+          </a:p>
+          <a:p>
+            <a:r>
+              <a:t>Bước 2: chốt tính năng [PPTX-05: đúng trục đọc]</a:t>
             </a:r>
           </a:p>
         </p:txBody>
       </p:sp>
       <p:pic>
         <p:nvPicPr>
-          <p:cNvPr id="4" name="Picture 3" descr="Sơ đồ timeline quý 3: tháng 7 khảo sát, tháng 8 chốt tính năng"/>
+          <p:cNvPr id="4" name="Picture 3" descr="Sơ đồ timeline quý 3: tháng 7 khảo sát, tháng 8 chốt [PPTX-02]"/>
           <p:cNvPicPr>
             <a:picLocks noChangeAspect="1"/>
           </p:cNvPicPr>
@@ -3718,7 +3719,7 @@
           <a:lstStyle/>
           <a:p>
             <a:r>
-              <a:t>Doanh thu theo tháng</a:t>
+              <a:t>Doanh thu theo tháng [PPTX-06]</a:t>
             </a:r>
           </a:p>
         </p:txBody>
@@ -3741,6 +3742,177 @@
           </a:graphicData>
         </a:graphic>
       </p:graphicFrame>
+    </p:spTree>
+  </p:cSld>
+  <p:clrMapOvr>
+    <a:masterClrMapping/>
+  </p:clrMapOvr>
+</p:sld>
+</file>
+
+<file path=ppt/slides/slide3.xml><?xml version="1.0" encoding="utf-8"?>
+<p:sld xmlns:a="http://schemas.openxmlformats.org/drawingml/2006/main" xmlns:p="http://schemas.openxmlformats.org/presentationml/2006/main" xmlns:r="http://schemas.openxmlformats.org/officeDocument/2006/relationships">
+  <p:cSld>
+    <p:spTree>
+      <p:nvGrpSpPr>
+        <p:cNvPr id="1" name=""/>
+        <p:cNvGrpSpPr/>
+        <p:nvPr/>
+      </p:nvGrpSpPr>
+      <p:grpSpPr/>
+      <p:sp>
+        <p:nvSpPr>
+          <p:cNvPr id="2" name="Title 1"/>
+          <p:cNvSpPr>
+            <a:spLocks noGrp="1"/>
+          </p:cNvSpPr>
+          <p:nvPr>
+            <p:ph type="title"/>
+          </p:nvPr>
+        </p:nvSpPr>
+        <p:spPr/>
+        <p:txBody>
+          <a:bodyPr/>
+          <a:lstStyle/>
+          <a:p>
+            <a:r>
+              <a:t>Chi tiết doanh thu [PPTX-08]</a:t>
+            </a:r>
+          </a:p>
+        </p:txBody>
+      </p:sp>
+      <p:graphicFrame>
+        <p:nvGraphicFramePr>
+          <p:cNvPr id="3" name="Table 2"/>
+          <p:cNvGraphicFramePr>
+            <a:graphicFrameLocks noGrp="1"/>
+          </p:cNvGraphicFramePr>
+          <p:nvPr/>
+        </p:nvGraphicFramePr>
+        <p:xfrm>
+          <a:off x="914400" y="1828800"/>
+          <a:ext cx="3657600" cy="1828800"/>
+        </p:xfrm>
+        <a:graphic>
+          <a:graphicData uri="http://schemas.openxmlformats.org/drawingml/2006/table">
+            <a:tbl>
+              <a:tblPr firstRow="1" bandRow="1">
+                <a:tableStyleId>{5C22544A-7EE6-4342-B048-85BDC9FD1C3A}</a:tableStyleId>
+              </a:tblPr>
+              <a:tblGrid>
+                <a:gridCol w="1828800"/>
+                <a:gridCol w="1828800"/>
+              </a:tblGrid>
+              <a:tr h="609600">
+                <a:tc>
+                  <a:txBody>
+                    <a:bodyPr/>
+                    <a:lstStyle/>
+                    <a:p>
+                      <a:r>
+                        <a:t>Tháng</a:t>
+                      </a:r>
+                    </a:p>
+                  </a:txBody>
+                  <a:tcPr/>
+                </a:tc>
+                <a:tc>
+                  <a:txBody>
+                    <a:bodyPr/>
+                    <a:lstStyle/>
+                    <a:p>
+                      <a:r>
+                        <a:t>Doanh thu [PPTX-04: số liệu bằng chữ]</a:t>
+                      </a:r>
+                    </a:p>
+                  </a:txBody>
+                  <a:tcPr/>
+                </a:tc>
+              </a:tr>
+              <a:tr h="609600">
+                <a:tc>
+                  <a:txBody>
+                    <a:bodyPr/>
+                    <a:lstStyle/>
+                    <a:p>
+                      <a:r>
+                        <a:t>07</a:t>
+                      </a:r>
+                    </a:p>
+                  </a:txBody>
+                  <a:tcPr/>
+                </a:tc>
+                <a:tc>
+                  <a:txBody>
+                    <a:bodyPr/>
+                    <a:lstStyle/>
+                    <a:p>
+                      <a:r>
+                        <a:t>100</a:t>
+                      </a:r>
+                    </a:p>
+                  </a:txBody>
+                  <a:tcPr/>
+                </a:tc>
+              </a:tr>
+              <a:tr h="609600">
+                <a:tc>
+                  <a:txBody>
+                    <a:bodyPr/>
+                    <a:lstStyle/>
+                    <a:p>
+                      <a:r>
+                        <a:t>08</a:t>
+                      </a:r>
+                    </a:p>
+                  </a:txBody>
+                  <a:tcPr/>
+                </a:tc>
+                <a:tc>
+                  <a:txBody>
+                    <a:bodyPr/>
+                    <a:lstStyle/>
+                    <a:p>
+                      <a:r>
+                        <a:t>200</a:t>
+                      </a:r>
+                    </a:p>
+                  </a:txBody>
+                  <a:tcPr/>
+                </a:tc>
+              </a:tr>
+            </a:tbl>
+          </a:graphicData>
+        </a:graphic>
+      </p:graphicFrame>
+      <p:sp>
+        <p:nvSpPr>
+          <p:cNvPr id="4" name="TextBox 3"/>
+          <p:cNvSpPr txBox="1"/>
+          <p:nvPr/>
+        </p:nvSpPr>
+        <p:spPr>
+          <a:xfrm>
+            <a:off x="5486400" y="1828800"/>
+            <a:ext cx="2743200" cy="548640"/>
+          </a:xfrm>
+          <a:prstGeom prst="rect">
+            <a:avLst/>
+          </a:prstGeom>
+          <a:noFill/>
+        </p:spPr>
+        <p:txBody>
+          <a:bodyPr wrap="none">
+            <a:spAutoFit/>
+          </a:bodyPr>
+          <a:lstStyle/>
+          <a:p>
+            <a:r>
+              <a:t>▲ Tăng trưởng — icon kèm nhãn chữ [PPTX-10]</a:t>
+            </a:r>
+          </a:p>
+        </p:txBody>
+      </p:sp>
     </p:spTree>
   </p:cSld>
   <p:clrMapOvr>
